--- a/BipedalWalker_AlgoritmoGenetico.pptx
+++ b/BipedalWalker_AlgoritmoGenetico.pptx
@@ -2721,14 +2721,41 @@
       </p:sp>
       <p:sp>
         <p:nvSpPr>
-          <p:cNvPr id="6" name="Text 4"/>
-          <p:cNvSpPr/>
-          <p:nvPr/>
-        </p:nvSpPr>
-        <p:spPr>
-          <a:xfrm>
-            <a:off x="502920" y="1207008"/>
-            <a:ext cx="2542032" cy="594360"/>
+          <p:cNvPr id="6" name="Shape 4"/>
+          <p:cNvSpPr/>
+          <p:nvPr/>
+        </p:nvSpPr>
+        <p:spPr>
+          <a:xfrm>
+            <a:off x="1216152" y="1188720"/>
+            <a:ext cx="914400" cy="640080"/>
+          </a:xfrm>
+          <a:prstGeom prst="ellipse">
+            <a:avLst/>
+          </a:prstGeom>
+          <a:solidFill>
+            <a:srgbClr val="00D4B8">
+              <a:alpha val="75000"/>
+            </a:srgbClr>
+          </a:solidFill>
+          <a:ln w="12700">
+            <a:solidFill>
+              <a:srgbClr val="00D4B8"/>
+            </a:solidFill>
+            <a:prstDash val="solid"/>
+          </a:ln>
+        </p:spPr>
+      </p:sp>
+      <p:sp>
+        <p:nvSpPr>
+          <p:cNvPr id="7" name="Text 5"/>
+          <p:cNvSpPr/>
+          <p:nvPr/>
+        </p:nvSpPr>
+        <p:spPr>
+          <a:xfrm>
+            <a:off x="1216152" y="1188720"/>
+            <a:ext cx="914400" cy="640080"/>
           </a:xfrm>
           <a:prstGeom prst="rect">
             <a:avLst/>
@@ -2744,20 +2771,20 @@
               <a:buNone/>
             </a:pPr>
             <a:r>
-              <a:rPr lang="en-US" sz="3400" dirty="0">
-                <a:solidFill>
-                  <a:srgbClr val="000000"/>
-                </a:solidFill>
-              </a:rPr>
-              <a:t>🧬</a:t>
-            </a:r>
-            <a:endParaRPr lang="en-US" sz="3400" dirty="0"/>
-          </a:p>
-        </p:txBody>
-      </p:sp>
-      <p:sp>
-        <p:nvSpPr>
-          <p:cNvPr id="7" name="Text 5"/>
+              <a:rPr lang="en-US" sz="1400" b="1" dirty="0">
+                <a:solidFill>
+                  <a:srgbClr val="FFFFFF"/>
+                </a:solidFill>
+              </a:rPr>
+              <a:t>SIM</a:t>
+            </a:r>
+            <a:endParaRPr lang="en-US" sz="1400" dirty="0"/>
+          </a:p>
+        </p:txBody>
+      </p:sp>
+      <p:sp>
+        <p:nvSpPr>
+          <p:cNvPr id="8" name="Text 6"/>
           <p:cNvSpPr/>
           <p:nvPr/>
         </p:nvSpPr>
@@ -2796,7 +2823,7 @@
       </p:sp>
       <p:sp>
         <p:nvSpPr>
-          <p:cNvPr id="8" name="Text 6"/>
+          <p:cNvPr id="9" name="Text 7"/>
           <p:cNvSpPr/>
           <p:nvPr/>
         </p:nvSpPr>
@@ -2835,7 +2862,7 @@
       </p:sp>
       <p:sp>
         <p:nvSpPr>
-          <p:cNvPr id="9" name="Shape 7"/>
+          <p:cNvPr id="10" name="Shape 8"/>
           <p:cNvSpPr/>
           <p:nvPr/>
         </p:nvSpPr>
@@ -2867,7 +2894,7 @@
       </p:sp>
       <p:sp>
         <p:nvSpPr>
-          <p:cNvPr id="10" name="Shape 8"/>
+          <p:cNvPr id="11" name="Shape 9"/>
           <p:cNvSpPr/>
           <p:nvPr/>
         </p:nvSpPr>
@@ -2892,14 +2919,41 @@
       </p:sp>
       <p:sp>
         <p:nvSpPr>
-          <p:cNvPr id="11" name="Text 9"/>
-          <p:cNvSpPr/>
-          <p:nvPr/>
-        </p:nvSpPr>
-        <p:spPr>
-          <a:xfrm>
-            <a:off x="3429000" y="1207008"/>
-            <a:ext cx="2542032" cy="594360"/>
+          <p:cNvPr id="12" name="Shape 10"/>
+          <p:cNvSpPr/>
+          <p:nvPr/>
+        </p:nvSpPr>
+        <p:spPr>
+          <a:xfrm>
+            <a:off x="4142232" y="1188720"/>
+            <a:ext cx="914400" cy="640080"/>
+          </a:xfrm>
+          <a:prstGeom prst="ellipse">
+            <a:avLst/>
+          </a:prstGeom>
+          <a:solidFill>
+            <a:srgbClr val="7B61FF">
+              <a:alpha val="75000"/>
+            </a:srgbClr>
+          </a:solidFill>
+          <a:ln w="12700">
+            <a:solidFill>
+              <a:srgbClr val="7B61FF"/>
+            </a:solidFill>
+            <a:prstDash val="solid"/>
+          </a:ln>
+        </p:spPr>
+      </p:sp>
+      <p:sp>
+        <p:nvSpPr>
+          <p:cNvPr id="13" name="Text 11"/>
+          <p:cNvSpPr/>
+          <p:nvPr/>
+        </p:nvSpPr>
+        <p:spPr>
+          <a:xfrm>
+            <a:off x="4142232" y="1188720"/>
+            <a:ext cx="914400" cy="640080"/>
           </a:xfrm>
           <a:prstGeom prst="rect">
             <a:avLst/>
@@ -2915,20 +2969,20 @@
               <a:buNone/>
             </a:pPr>
             <a:r>
-              <a:rPr lang="en-US" sz="3400" dirty="0">
-                <a:solidFill>
-                  <a:srgbClr val="000000"/>
-                </a:solidFill>
-              </a:rPr>
-              <a:t>🤖</a:t>
-            </a:r>
-            <a:endParaRPr lang="en-US" sz="3400" dirty="0"/>
-          </a:p>
-        </p:txBody>
-      </p:sp>
-      <p:sp>
-        <p:nvSpPr>
-          <p:cNvPr id="12" name="Text 10"/>
+              <a:rPr lang="en-US" sz="1400" b="1" dirty="0">
+                <a:solidFill>
+                  <a:srgbClr val="FFFFFF"/>
+                </a:solidFill>
+              </a:rPr>
+              <a:t>AG</a:t>
+            </a:r>
+            <a:endParaRPr lang="en-US" sz="1400" dirty="0"/>
+          </a:p>
+        </p:txBody>
+      </p:sp>
+      <p:sp>
+        <p:nvSpPr>
+          <p:cNvPr id="14" name="Text 12"/>
           <p:cNvSpPr/>
           <p:nvPr/>
         </p:nvSpPr>
@@ -2967,7 +3021,7 @@
       </p:sp>
       <p:sp>
         <p:nvSpPr>
-          <p:cNvPr id="13" name="Text 11"/>
+          <p:cNvPr id="15" name="Text 13"/>
           <p:cNvSpPr/>
           <p:nvPr/>
         </p:nvSpPr>
@@ -3006,7 +3060,7 @@
       </p:sp>
       <p:sp>
         <p:nvSpPr>
-          <p:cNvPr id="14" name="Shape 12"/>
+          <p:cNvPr id="16" name="Shape 14"/>
           <p:cNvSpPr/>
           <p:nvPr/>
         </p:nvSpPr>
@@ -3038,7 +3092,7 @@
       </p:sp>
       <p:sp>
         <p:nvSpPr>
-          <p:cNvPr id="15" name="Shape 13"/>
+          <p:cNvPr id="17" name="Shape 15"/>
           <p:cNvSpPr/>
           <p:nvPr/>
         </p:nvSpPr>
@@ -3063,14 +3117,41 @@
       </p:sp>
       <p:sp>
         <p:nvSpPr>
-          <p:cNvPr id="16" name="Text 14"/>
-          <p:cNvSpPr/>
-          <p:nvPr/>
-        </p:nvSpPr>
-        <p:spPr>
-          <a:xfrm>
-            <a:off x="6355080" y="1207008"/>
-            <a:ext cx="2542032" cy="594360"/>
+          <p:cNvPr id="18" name="Shape 16"/>
+          <p:cNvSpPr/>
+          <p:nvPr/>
+        </p:nvSpPr>
+        <p:spPr>
+          <a:xfrm>
+            <a:off x="7068312" y="1188720"/>
+            <a:ext cx="914400" cy="640080"/>
+          </a:xfrm>
+          <a:prstGeom prst="ellipse">
+            <a:avLst/>
+          </a:prstGeom>
+          <a:solidFill>
+            <a:srgbClr val="FF6B35">
+              <a:alpha val="75000"/>
+            </a:srgbClr>
+          </a:solidFill>
+          <a:ln w="12700">
+            <a:solidFill>
+              <a:srgbClr val="FF6B35"/>
+            </a:solidFill>
+            <a:prstDash val="solid"/>
+          </a:ln>
+        </p:spPr>
+      </p:sp>
+      <p:sp>
+        <p:nvSpPr>
+          <p:cNvPr id="19" name="Text 17"/>
+          <p:cNvSpPr/>
+          <p:nvPr/>
+        </p:nvSpPr>
+        <p:spPr>
+          <a:xfrm>
+            <a:off x="7068312" y="1188720"/>
+            <a:ext cx="914400" cy="640080"/>
           </a:xfrm>
           <a:prstGeom prst="rect">
             <a:avLst/>
@@ -3086,20 +3167,20 @@
               <a:buNone/>
             </a:pPr>
             <a:r>
-              <a:rPr lang="en-US" sz="3400" dirty="0">
-                <a:solidFill>
-                  <a:srgbClr val="000000"/>
-                </a:solidFill>
-              </a:rPr>
-              <a:t>📊</a:t>
-            </a:r>
-            <a:endParaRPr lang="en-US" sz="3400" dirty="0"/>
-          </a:p>
-        </p:txBody>
-      </p:sp>
-      <p:sp>
-        <p:nvSpPr>
-          <p:cNvPr id="17" name="Text 15"/>
+              <a:rPr lang="en-US" sz="1400" b="1" dirty="0">
+                <a:solidFill>
+                  <a:srgbClr val="FFFFFF"/>
+                </a:solidFill>
+              </a:rPr>
+              <a:t>WEB</a:t>
+            </a:r>
+            <a:endParaRPr lang="en-US" sz="1400" dirty="0"/>
+          </a:p>
+        </p:txBody>
+      </p:sp>
+      <p:sp>
+        <p:nvSpPr>
+          <p:cNvPr id="20" name="Text 18"/>
           <p:cNvSpPr/>
           <p:nvPr/>
         </p:nvSpPr>
@@ -3138,7 +3219,7 @@
       </p:sp>
       <p:sp>
         <p:nvSpPr>
-          <p:cNvPr id="18" name="Text 16"/>
+          <p:cNvPr id="21" name="Text 19"/>
           <p:cNvSpPr/>
           <p:nvPr/>
         </p:nvSpPr>
@@ -3169,7 +3250,7 @@
                 <a:ea typeface="Calibri" pitchFamily="34" charset="-122"/>
                 <a:cs typeface="Calibri" pitchFamily="34" charset="-120"/>
               </a:rPr>
-              <a:t>Visualización en canvas HTML5 con gráfica de progreso, control de velocidad (1×–8×) y métricas por generación.</a:t>
+              <a:t>Visualización en canvas HTML5 con gráfica de progreso, control de velocidad (1×–64×) y métricas por generación.</a:t>
             </a:r>
             <a:endParaRPr lang="en-US" sz="1150" dirty="0"/>
           </a:p>
@@ -3177,7 +3258,7 @@
       </p:sp>
       <p:sp>
         <p:nvSpPr>
-          <p:cNvPr id="19" name="Text 17"/>
+          <p:cNvPr id="22" name="Text 20"/>
           <p:cNvSpPr/>
           <p:nvPr/>
         </p:nvSpPr>
@@ -3216,7 +3297,7 @@
       </p:sp>
       <p:sp>
         <p:nvSpPr>
-          <p:cNvPr id="20" name="Text 18"/>
+          <p:cNvPr id="23" name="Text 21"/>
           <p:cNvSpPr/>
           <p:nvPr/>
         </p:nvSpPr>
@@ -3252,7 +3333,7 @@
       </p:sp>
       <p:sp>
         <p:nvSpPr>
-          <p:cNvPr id="21" name="Text 19"/>
+          <p:cNvPr id="24" name="Text 22"/>
           <p:cNvSpPr/>
           <p:nvPr/>
         </p:nvSpPr>
@@ -3291,7 +3372,7 @@
       </p:sp>
       <p:sp>
         <p:nvSpPr>
-          <p:cNvPr id="22" name="Text 20"/>
+          <p:cNvPr id="25" name="Text 23"/>
           <p:cNvSpPr/>
           <p:nvPr/>
         </p:nvSpPr>
@@ -3327,7 +3408,7 @@
       </p:sp>
       <p:sp>
         <p:nvSpPr>
-          <p:cNvPr id="23" name="Text 21"/>
+          <p:cNvPr id="26" name="Text 24"/>
           <p:cNvSpPr/>
           <p:nvPr/>
         </p:nvSpPr>
@@ -3366,7 +3447,7 @@
       </p:sp>
       <p:sp>
         <p:nvSpPr>
-          <p:cNvPr id="24" name="Text 22"/>
+          <p:cNvPr id="27" name="Text 25"/>
           <p:cNvSpPr/>
           <p:nvPr/>
         </p:nvSpPr>
@@ -3402,7 +3483,7 @@
       </p:sp>
       <p:sp>
         <p:nvSpPr>
-          <p:cNvPr id="25" name="Text 23"/>
+          <p:cNvPr id="28" name="Text 26"/>
           <p:cNvSpPr/>
           <p:nvPr/>
         </p:nvSpPr>
@@ -3441,7 +3522,7 @@
       </p:sp>
       <p:sp>
         <p:nvSpPr>
-          <p:cNvPr id="26" name="Text 24"/>
+          <p:cNvPr id="29" name="Text 27"/>
           <p:cNvSpPr/>
           <p:nvPr/>
         </p:nvSpPr>
@@ -6747,7 +6828,7 @@
                 <a:ea typeface="Calibri" pitchFamily="34" charset="-122"/>
                 <a:cs typeface="Calibri" pitchFamily="34" charset="-120"/>
               </a:rPr>
-              <a:t>💡  Inicialización híbrida: 50% con patrón de marcha pre-seeded (phase_hip_R ≈ phase_hip_L + π) + 50% aleatorio</a:t>
+              <a:t>[!]  Inicialización híbrida: 50% con patrón de marcha pre-seeded (phase_hip_R aprox phase_hip_L + π) + 50% aleatorio</a:t>
             </a:r>
             <a:endParaRPr lang="en-US" sz="1100" dirty="0"/>
           </a:p>
@@ -6971,14 +7052,41 @@
       </p:sp>
       <p:sp>
         <p:nvSpPr>
-          <p:cNvPr id="8" name="Text 6"/>
-          <p:cNvSpPr/>
-          <p:nvPr/>
-        </p:nvSpPr>
-        <p:spPr>
-          <a:xfrm>
-            <a:off x="475488" y="1755648"/>
-            <a:ext cx="1426464" cy="502920"/>
+          <p:cNvPr id="8" name="Shape 6"/>
+          <p:cNvSpPr/>
+          <p:nvPr/>
+        </p:nvSpPr>
+        <p:spPr>
+          <a:xfrm>
+            <a:off x="822960" y="1755648"/>
+            <a:ext cx="731520" cy="420624"/>
+          </a:xfrm>
+          <a:prstGeom prst="rect">
+            <a:avLst/>
+          </a:prstGeom>
+          <a:solidFill>
+            <a:srgbClr val="00D4B8">
+              <a:alpha val="70000"/>
+            </a:srgbClr>
+          </a:solidFill>
+          <a:ln w="12700">
+            <a:solidFill>
+              <a:srgbClr val="00D4B8"/>
+            </a:solidFill>
+            <a:prstDash val="solid"/>
+          </a:ln>
+        </p:spPr>
+      </p:sp>
+      <p:sp>
+        <p:nvSpPr>
+          <p:cNvPr id="9" name="Text 7"/>
+          <p:cNvSpPr/>
+          <p:nvPr/>
+        </p:nvSpPr>
+        <p:spPr>
+          <a:xfrm>
+            <a:off x="822960" y="1755648"/>
+            <a:ext cx="731520" cy="420624"/>
           </a:xfrm>
           <a:prstGeom prst="rect">
             <a:avLst/>
@@ -6994,20 +7102,20 @@
               <a:buNone/>
             </a:pPr>
             <a:r>
-              <a:rPr lang="en-US" sz="2600" dirty="0">
-                <a:solidFill>
-                  <a:srgbClr val="000000"/>
-                </a:solidFill>
-              </a:rPr>
-              <a:t>🏃</a:t>
-            </a:r>
-            <a:endParaRPr lang="en-US" sz="2600" dirty="0"/>
-          </a:p>
-        </p:txBody>
-      </p:sp>
-      <p:sp>
-        <p:nvSpPr>
-          <p:cNvPr id="9" name="Text 7"/>
+              <a:rPr lang="en-US" sz="1300" b="1" dirty="0">
+                <a:solidFill>
+                  <a:srgbClr val="FFFFFF"/>
+                </a:solidFill>
+              </a:rPr>
+              <a:t>RUN</a:t>
+            </a:r>
+            <a:endParaRPr lang="en-US" sz="1300" dirty="0"/>
+          </a:p>
+        </p:txBody>
+      </p:sp>
+      <p:sp>
+        <p:nvSpPr>
+          <p:cNvPr id="10" name="Text 8"/>
           <p:cNvSpPr/>
           <p:nvPr/>
         </p:nvSpPr>
@@ -7046,7 +7154,7 @@
       </p:sp>
       <p:sp>
         <p:nvSpPr>
-          <p:cNvPr id="10" name="Text 8"/>
+          <p:cNvPr id="11" name="Text 9"/>
           <p:cNvSpPr/>
           <p:nvPr/>
         </p:nvSpPr>
@@ -7128,7 +7236,7 @@
                 <a:ea typeface="Calibri" pitchFamily="34" charset="-122"/>
                 <a:cs typeface="Calibri" pitchFamily="34" charset="-120"/>
               </a:rPr>
-              <a:t>recorrida – penalización</a:t>
+              <a:t>recorrida - penalización</a:t>
             </a:r>
             <a:endParaRPr lang="en-US" sz="1050" dirty="0"/>
           </a:p>
@@ -7153,7 +7261,7 @@
       </p:sp>
       <p:sp>
         <p:nvSpPr>
-          <p:cNvPr id="11" name="Shape 9"/>
+          <p:cNvPr id="12" name="Shape 10"/>
           <p:cNvSpPr/>
           <p:nvPr/>
         </p:nvSpPr>
@@ -7178,7 +7286,7 @@
       </p:sp>
       <p:sp>
         <p:nvSpPr>
-          <p:cNvPr id="12" name="Text 10"/>
+          <p:cNvPr id="13" name="Text 11"/>
           <p:cNvSpPr/>
           <p:nvPr/>
         </p:nvSpPr>
@@ -7214,7 +7322,7 @@
       </p:sp>
       <p:sp>
         <p:nvSpPr>
-          <p:cNvPr id="13" name="Shape 11"/>
+          <p:cNvPr id="14" name="Shape 12"/>
           <p:cNvSpPr/>
           <p:nvPr/>
         </p:nvSpPr>
@@ -7246,7 +7354,7 @@
       </p:sp>
       <p:sp>
         <p:nvSpPr>
-          <p:cNvPr id="14" name="Shape 12"/>
+          <p:cNvPr id="15" name="Shape 13"/>
           <p:cNvSpPr/>
           <p:nvPr/>
         </p:nvSpPr>
@@ -7271,7 +7379,7 @@
       </p:sp>
       <p:sp>
         <p:nvSpPr>
-          <p:cNvPr id="15" name="Shape 13"/>
+          <p:cNvPr id="16" name="Shape 14"/>
           <p:cNvSpPr/>
           <p:nvPr/>
         </p:nvSpPr>
@@ -7298,7 +7406,7 @@
       </p:sp>
       <p:sp>
         <p:nvSpPr>
-          <p:cNvPr id="16" name="Text 14"/>
+          <p:cNvPr id="17" name="Text 15"/>
           <p:cNvSpPr/>
           <p:nvPr/>
         </p:nvSpPr>
@@ -7334,14 +7442,41 @@
       </p:sp>
       <p:sp>
         <p:nvSpPr>
-          <p:cNvPr id="17" name="Text 15"/>
-          <p:cNvSpPr/>
-          <p:nvPr/>
-        </p:nvSpPr>
-        <p:spPr>
-          <a:xfrm>
-            <a:off x="2231136" y="1755648"/>
-            <a:ext cx="1426464" cy="502920"/>
+          <p:cNvPr id="18" name="Shape 16"/>
+          <p:cNvSpPr/>
+          <p:nvPr/>
+        </p:nvSpPr>
+        <p:spPr>
+          <a:xfrm>
+            <a:off x="2578608" y="1755648"/>
+            <a:ext cx="731520" cy="420624"/>
+          </a:xfrm>
+          <a:prstGeom prst="rect">
+            <a:avLst/>
+          </a:prstGeom>
+          <a:solidFill>
+            <a:srgbClr val="7B61FF">
+              <a:alpha val="70000"/>
+            </a:srgbClr>
+          </a:solidFill>
+          <a:ln w="12700">
+            <a:solidFill>
+              <a:srgbClr val="7B61FF"/>
+            </a:solidFill>
+            <a:prstDash val="solid"/>
+          </a:ln>
+        </p:spPr>
+      </p:sp>
+      <p:sp>
+        <p:nvSpPr>
+          <p:cNvPr id="19" name="Text 17"/>
+          <p:cNvSpPr/>
+          <p:nvPr/>
+        </p:nvSpPr>
+        <p:spPr>
+          <a:xfrm>
+            <a:off x="2578608" y="1755648"/>
+            <a:ext cx="731520" cy="420624"/>
           </a:xfrm>
           <a:prstGeom prst="rect">
             <a:avLst/>
@@ -7357,20 +7492,20 @@
               <a:buNone/>
             </a:pPr>
             <a:r>
-              <a:rPr lang="en-US" sz="2600" dirty="0">
-                <a:solidFill>
-                  <a:srgbClr val="000000"/>
-                </a:solidFill>
-              </a:rPr>
-              <a:t>🏆</a:t>
-            </a:r>
-            <a:endParaRPr lang="en-US" sz="2600" dirty="0"/>
-          </a:p>
-        </p:txBody>
-      </p:sp>
-      <p:sp>
-        <p:nvSpPr>
-          <p:cNvPr id="18" name="Text 16"/>
+              <a:rPr lang="en-US" sz="1300" b="1" dirty="0">
+                <a:solidFill>
+                  <a:srgbClr val="FFFFFF"/>
+                </a:solidFill>
+              </a:rPr>
+              <a:t>TOP</a:t>
+            </a:r>
+            <a:endParaRPr lang="en-US" sz="1300" dirty="0"/>
+          </a:p>
+        </p:txBody>
+      </p:sp>
+      <p:sp>
+        <p:nvSpPr>
+          <p:cNvPr id="20" name="Text 18"/>
           <p:cNvSpPr/>
           <p:nvPr/>
         </p:nvSpPr>
@@ -7409,7 +7544,7 @@
       </p:sp>
       <p:sp>
         <p:nvSpPr>
-          <p:cNvPr id="19" name="Text 17"/>
+          <p:cNvPr id="21" name="Text 19"/>
           <p:cNvSpPr/>
           <p:nvPr/>
         </p:nvSpPr>
@@ -7516,7 +7651,7 @@
       </p:sp>
       <p:sp>
         <p:nvSpPr>
-          <p:cNvPr id="20" name="Shape 18"/>
+          <p:cNvPr id="22" name="Shape 20"/>
           <p:cNvSpPr/>
           <p:nvPr/>
         </p:nvSpPr>
@@ -7541,7 +7676,7 @@
       </p:sp>
       <p:sp>
         <p:nvSpPr>
-          <p:cNvPr id="21" name="Text 19"/>
+          <p:cNvPr id="23" name="Text 21"/>
           <p:cNvSpPr/>
           <p:nvPr/>
         </p:nvSpPr>
@@ -7577,7 +7712,7 @@
       </p:sp>
       <p:sp>
         <p:nvSpPr>
-          <p:cNvPr id="22" name="Shape 20"/>
+          <p:cNvPr id="24" name="Shape 22"/>
           <p:cNvSpPr/>
           <p:nvPr/>
         </p:nvSpPr>
@@ -7609,7 +7744,7 @@
       </p:sp>
       <p:sp>
         <p:nvSpPr>
-          <p:cNvPr id="23" name="Shape 21"/>
+          <p:cNvPr id="25" name="Shape 23"/>
           <p:cNvSpPr/>
           <p:nvPr/>
         </p:nvSpPr>
@@ -7634,7 +7769,7 @@
       </p:sp>
       <p:sp>
         <p:nvSpPr>
-          <p:cNvPr id="24" name="Shape 22"/>
+          <p:cNvPr id="26" name="Shape 24"/>
           <p:cNvSpPr/>
           <p:nvPr/>
         </p:nvSpPr>
@@ -7661,7 +7796,7 @@
       </p:sp>
       <p:sp>
         <p:nvSpPr>
-          <p:cNvPr id="25" name="Text 23"/>
+          <p:cNvPr id="27" name="Text 25"/>
           <p:cNvSpPr/>
           <p:nvPr/>
         </p:nvSpPr>
@@ -7697,14 +7832,41 @@
       </p:sp>
       <p:sp>
         <p:nvSpPr>
-          <p:cNvPr id="26" name="Text 24"/>
-          <p:cNvSpPr/>
-          <p:nvPr/>
-        </p:nvSpPr>
-        <p:spPr>
-          <a:xfrm>
-            <a:off x="3986784" y="1755648"/>
-            <a:ext cx="1426464" cy="502920"/>
+          <p:cNvPr id="28" name="Shape 26"/>
+          <p:cNvSpPr/>
+          <p:nvPr/>
+        </p:nvSpPr>
+        <p:spPr>
+          <a:xfrm>
+            <a:off x="4334256" y="1755648"/>
+            <a:ext cx="731520" cy="420624"/>
+          </a:xfrm>
+          <a:prstGeom prst="rect">
+            <a:avLst/>
+          </a:prstGeom>
+          <a:solidFill>
+            <a:srgbClr val="FF6B35">
+              <a:alpha val="70000"/>
+            </a:srgbClr>
+          </a:solidFill>
+          <a:ln w="12700">
+            <a:solidFill>
+              <a:srgbClr val="FF6B35"/>
+            </a:solidFill>
+            <a:prstDash val="solid"/>
+          </a:ln>
+        </p:spPr>
+      </p:sp>
+      <p:sp>
+        <p:nvSpPr>
+          <p:cNvPr id="29" name="Text 27"/>
+          <p:cNvSpPr/>
+          <p:nvPr/>
+        </p:nvSpPr>
+        <p:spPr>
+          <a:xfrm>
+            <a:off x="4334256" y="1755648"/>
+            <a:ext cx="731520" cy="420624"/>
           </a:xfrm>
           <a:prstGeom prst="rect">
             <a:avLst/>
@@ -7720,20 +7882,20 @@
               <a:buNone/>
             </a:pPr>
             <a:r>
-              <a:rPr lang="en-US" sz="2600" dirty="0">
-                <a:solidFill>
-                  <a:srgbClr val="000000"/>
-                </a:solidFill>
-              </a:rPr>
-              <a:t>🔀</a:t>
-            </a:r>
-            <a:endParaRPr lang="en-US" sz="2600" dirty="0"/>
-          </a:p>
-        </p:txBody>
-      </p:sp>
-      <p:sp>
-        <p:nvSpPr>
-          <p:cNvPr id="27" name="Text 25"/>
+              <a:rPr lang="en-US" sz="1300" b="1" dirty="0">
+                <a:solidFill>
+                  <a:srgbClr val="FFFFFF"/>
+                </a:solidFill>
+              </a:rPr>
+              <a:t>X</a:t>
+            </a:r>
+            <a:endParaRPr lang="en-US" sz="1300" dirty="0"/>
+          </a:p>
+        </p:txBody>
+      </p:sp>
+      <p:sp>
+        <p:nvSpPr>
+          <p:cNvPr id="30" name="Text 28"/>
           <p:cNvSpPr/>
           <p:nvPr/>
         </p:nvSpPr>
@@ -7772,7 +7934,7 @@
       </p:sp>
       <p:sp>
         <p:nvSpPr>
-          <p:cNvPr id="28" name="Text 26"/>
+          <p:cNvPr id="31" name="Text 29"/>
           <p:cNvSpPr/>
           <p:nvPr/>
         </p:nvSpPr>
@@ -7837,7 +7999,7 @@
                 <a:ea typeface="Calibri" pitchFamily="34" charset="-122"/>
                 <a:cs typeface="Calibri" pitchFamily="34" charset="-120"/>
               </a:rPr>
-              <a:t>heredaad de padre</a:t>
+              <a:t>hereda de padre</a:t>
             </a:r>
             <a:endParaRPr lang="en-US" sz="1050" dirty="0"/>
           </a:p>
@@ -7879,7 +8041,7 @@
       </p:sp>
       <p:sp>
         <p:nvSpPr>
-          <p:cNvPr id="29" name="Shape 27"/>
+          <p:cNvPr id="32" name="Shape 30"/>
           <p:cNvSpPr/>
           <p:nvPr/>
         </p:nvSpPr>
@@ -7904,7 +8066,7 @@
       </p:sp>
       <p:sp>
         <p:nvSpPr>
-          <p:cNvPr id="30" name="Text 28"/>
+          <p:cNvPr id="33" name="Text 31"/>
           <p:cNvSpPr/>
           <p:nvPr/>
         </p:nvSpPr>
@@ -7940,7 +8102,7 @@
       </p:sp>
       <p:sp>
         <p:nvSpPr>
-          <p:cNvPr id="31" name="Shape 29"/>
+          <p:cNvPr id="34" name="Shape 32"/>
           <p:cNvSpPr/>
           <p:nvPr/>
         </p:nvSpPr>
@@ -7972,7 +8134,7 @@
       </p:sp>
       <p:sp>
         <p:nvSpPr>
-          <p:cNvPr id="32" name="Shape 30"/>
+          <p:cNvPr id="35" name="Shape 33"/>
           <p:cNvSpPr/>
           <p:nvPr/>
         </p:nvSpPr>
@@ -7997,7 +8159,7 @@
       </p:sp>
       <p:sp>
         <p:nvSpPr>
-          <p:cNvPr id="33" name="Shape 31"/>
+          <p:cNvPr id="36" name="Shape 34"/>
           <p:cNvSpPr/>
           <p:nvPr/>
         </p:nvSpPr>
@@ -8024,7 +8186,7 @@
       </p:sp>
       <p:sp>
         <p:nvSpPr>
-          <p:cNvPr id="34" name="Text 32"/>
+          <p:cNvPr id="37" name="Text 35"/>
           <p:cNvSpPr/>
           <p:nvPr/>
         </p:nvSpPr>
@@ -8060,14 +8222,41 @@
       </p:sp>
       <p:sp>
         <p:nvSpPr>
-          <p:cNvPr id="35" name="Text 33"/>
-          <p:cNvSpPr/>
-          <p:nvPr/>
-        </p:nvSpPr>
-        <p:spPr>
-          <a:xfrm>
-            <a:off x="5742432" y="1755648"/>
-            <a:ext cx="1426464" cy="502920"/>
+          <p:cNvPr id="38" name="Shape 36"/>
+          <p:cNvSpPr/>
+          <p:nvPr/>
+        </p:nvSpPr>
+        <p:spPr>
+          <a:xfrm>
+            <a:off x="6089904" y="1755648"/>
+            <a:ext cx="731520" cy="420624"/>
+          </a:xfrm>
+          <a:prstGeom prst="rect">
+            <a:avLst/>
+          </a:prstGeom>
+          <a:solidFill>
+            <a:srgbClr val="FFD700">
+              <a:alpha val="70000"/>
+            </a:srgbClr>
+          </a:solidFill>
+          <a:ln w="12700">
+            <a:solidFill>
+              <a:srgbClr val="FFD700"/>
+            </a:solidFill>
+            <a:prstDash val="solid"/>
+          </a:ln>
+        </p:spPr>
+      </p:sp>
+      <p:sp>
+        <p:nvSpPr>
+          <p:cNvPr id="39" name="Text 37"/>
+          <p:cNvSpPr/>
+          <p:nvPr/>
+        </p:nvSpPr>
+        <p:spPr>
+          <a:xfrm>
+            <a:off x="6089904" y="1755648"/>
+            <a:ext cx="731520" cy="420624"/>
           </a:xfrm>
           <a:prstGeom prst="rect">
             <a:avLst/>
@@ -8083,20 +8272,20 @@
               <a:buNone/>
             </a:pPr>
             <a:r>
-              <a:rPr lang="en-US" sz="2600" dirty="0">
-                <a:solidFill>
-                  <a:srgbClr val="000000"/>
-                </a:solidFill>
-              </a:rPr>
-              <a:t>⚡</a:t>
-            </a:r>
-            <a:endParaRPr lang="en-US" sz="2600" dirty="0"/>
-          </a:p>
-        </p:txBody>
-      </p:sp>
-      <p:sp>
-        <p:nvSpPr>
-          <p:cNvPr id="36" name="Text 34"/>
+              <a:rPr lang="en-US" sz="1300" b="1" dirty="0">
+                <a:solidFill>
+                  <a:srgbClr val="FFFFFF"/>
+                </a:solidFill>
+              </a:rPr>
+              <a:t>MUT</a:t>
+            </a:r>
+            <a:endParaRPr lang="en-US" sz="1300" dirty="0"/>
+          </a:p>
+        </p:txBody>
+      </p:sp>
+      <p:sp>
+        <p:nvSpPr>
+          <p:cNvPr id="40" name="Text 38"/>
           <p:cNvSpPr/>
           <p:nvPr/>
         </p:nvSpPr>
@@ -8135,7 +8324,7 @@
       </p:sp>
       <p:sp>
         <p:nvSpPr>
-          <p:cNvPr id="37" name="Text 35"/>
+          <p:cNvPr id="41" name="Text 39"/>
           <p:cNvSpPr/>
           <p:nvPr/>
         </p:nvSpPr>
@@ -8183,7 +8372,7 @@
                 <a:ea typeface="Calibri" pitchFamily="34" charset="-122"/>
                 <a:cs typeface="Calibri" pitchFamily="34" charset="-120"/>
               </a:rPr>
-              <a:t>(σ dinámico).</a:t>
+              <a:t>(sigma dinámico).</a:t>
             </a:r>
             <a:endParaRPr lang="en-US" sz="1050" dirty="0"/>
           </a:p>
@@ -8225,7 +8414,7 @@
       </p:sp>
       <p:sp>
         <p:nvSpPr>
-          <p:cNvPr id="38" name="Shape 36"/>
+          <p:cNvPr id="42" name="Shape 40"/>
           <p:cNvSpPr/>
           <p:nvPr/>
         </p:nvSpPr>
@@ -8250,7 +8439,7 @@
       </p:sp>
       <p:sp>
         <p:nvSpPr>
-          <p:cNvPr id="39" name="Text 37"/>
+          <p:cNvPr id="43" name="Text 41"/>
           <p:cNvSpPr/>
           <p:nvPr/>
         </p:nvSpPr>
@@ -8286,7 +8475,7 @@
       </p:sp>
       <p:sp>
         <p:nvSpPr>
-          <p:cNvPr id="40" name="Shape 38"/>
+          <p:cNvPr id="44" name="Shape 42"/>
           <p:cNvSpPr/>
           <p:nvPr/>
         </p:nvSpPr>
@@ -8318,7 +8507,7 @@
       </p:sp>
       <p:sp>
         <p:nvSpPr>
-          <p:cNvPr id="41" name="Shape 39"/>
+          <p:cNvPr id="45" name="Shape 43"/>
           <p:cNvSpPr/>
           <p:nvPr/>
         </p:nvSpPr>
@@ -8343,7 +8532,7 @@
       </p:sp>
       <p:sp>
         <p:nvSpPr>
-          <p:cNvPr id="42" name="Shape 40"/>
+          <p:cNvPr id="46" name="Shape 44"/>
           <p:cNvSpPr/>
           <p:nvPr/>
         </p:nvSpPr>
@@ -8370,7 +8559,7 @@
       </p:sp>
       <p:sp>
         <p:nvSpPr>
-          <p:cNvPr id="43" name="Text 41"/>
+          <p:cNvPr id="47" name="Text 45"/>
           <p:cNvSpPr/>
           <p:nvPr/>
         </p:nvSpPr>
@@ -8406,14 +8595,41 @@
       </p:sp>
       <p:sp>
         <p:nvSpPr>
-          <p:cNvPr id="44" name="Text 42"/>
-          <p:cNvSpPr/>
-          <p:nvPr/>
-        </p:nvSpPr>
-        <p:spPr>
-          <a:xfrm>
-            <a:off x="7498080" y="1755648"/>
-            <a:ext cx="1426464" cy="502920"/>
+          <p:cNvPr id="48" name="Shape 46"/>
+          <p:cNvSpPr/>
+          <p:nvPr/>
+        </p:nvSpPr>
+        <p:spPr>
+          <a:xfrm>
+            <a:off x="7845552" y="1755648"/>
+            <a:ext cx="731520" cy="420624"/>
+          </a:xfrm>
+          <a:prstGeom prst="rect">
+            <a:avLst/>
+          </a:prstGeom>
+          <a:solidFill>
+            <a:srgbClr val="2ECC71">
+              <a:alpha val="70000"/>
+            </a:srgbClr>
+          </a:solidFill>
+          <a:ln w="12700">
+            <a:solidFill>
+              <a:srgbClr val="2ECC71"/>
+            </a:solidFill>
+            <a:prstDash val="solid"/>
+          </a:ln>
+        </p:spPr>
+      </p:sp>
+      <p:sp>
+        <p:nvSpPr>
+          <p:cNvPr id="49" name="Text 47"/>
+          <p:cNvSpPr/>
+          <p:nvPr/>
+        </p:nvSpPr>
+        <p:spPr>
+          <a:xfrm>
+            <a:off x="7845552" y="1755648"/>
+            <a:ext cx="731520" cy="420624"/>
           </a:xfrm>
           <a:prstGeom prst="rect">
             <a:avLst/>
@@ -8429,20 +8645,20 @@
               <a:buNone/>
             </a:pPr>
             <a:r>
-              <a:rPr lang="en-US" sz="2600" dirty="0">
-                <a:solidFill>
-                  <a:srgbClr val="000000"/>
-                </a:solidFill>
-              </a:rPr>
-              <a:t>👑</a:t>
-            </a:r>
-            <a:endParaRPr lang="en-US" sz="2600" dirty="0"/>
-          </a:p>
-        </p:txBody>
-      </p:sp>
-      <p:sp>
-        <p:nvSpPr>
-          <p:cNvPr id="45" name="Text 43"/>
+              <a:rPr lang="en-US" sz="1300" b="1" dirty="0">
+                <a:solidFill>
+                  <a:srgbClr val="FFFFFF"/>
+                </a:solidFill>
+              </a:rPr>
+              <a:t>#1</a:t>
+            </a:r>
+            <a:endParaRPr lang="en-US" sz="1300" dirty="0"/>
+          </a:p>
+        </p:txBody>
+      </p:sp>
+      <p:sp>
+        <p:nvSpPr>
+          <p:cNvPr id="50" name="Text 48"/>
           <p:cNvSpPr/>
           <p:nvPr/>
         </p:nvSpPr>
@@ -8481,7 +8697,7 @@
       </p:sp>
       <p:sp>
         <p:nvSpPr>
-          <p:cNvPr id="46" name="Text 44"/>
+          <p:cNvPr id="51" name="Text 49"/>
           <p:cNvSpPr/>
           <p:nvPr/>
         </p:nvSpPr>
@@ -8588,7 +8804,7 @@
       </p:sp>
       <p:sp>
         <p:nvSpPr>
-          <p:cNvPr id="47" name="Shape 45"/>
+          <p:cNvPr id="52" name="Shape 50"/>
           <p:cNvSpPr/>
           <p:nvPr/>
         </p:nvSpPr>
@@ -8613,7 +8829,7 @@
       </p:sp>
       <p:sp>
         <p:nvSpPr>
-          <p:cNvPr id="48" name="Text 46"/>
+          <p:cNvPr id="53" name="Text 51"/>
           <p:cNvSpPr/>
           <p:nvPr/>
         </p:nvSpPr>
@@ -8999,7 +9215,7 @@
                 <a:ea typeface="Calibri" pitchFamily="34" charset="-122"/>
                 <a:cs typeface="Calibri" pitchFamily="34" charset="-120"/>
               </a:rPr>
-              <a:t>🔹 Diversidad alta (CV↑) → σ bajo → EXPLOTACIÓN</a:t>
+              <a:t>&gt;&gt; Diversidad alta (CV alto) -&gt; σ bajo -&gt; EXPLOTACIÓN</a:t>
             </a:r>
             <a:endParaRPr lang="en-US" sz="1200" dirty="0"/>
           </a:p>
@@ -9038,7 +9254,7 @@
                 <a:ea typeface="Calibri" pitchFamily="34" charset="-122"/>
                 <a:cs typeface="Calibri" pitchFamily="34" charset="-120"/>
               </a:rPr>
-              <a:t>🔹 Diversidad baja (CV↓) → σ alto → EXPLORACIÓN</a:t>
+              <a:t>&gt;&gt; Diversidad baja (CV bajo) -&gt; σ alto -&gt; EXPLORACIÓN</a:t>
             </a:r>
             <a:endParaRPr lang="en-US" sz="1200" dirty="0"/>
           </a:p>
@@ -9077,7 +9293,7 @@
                 <a:ea typeface="Calibri" pitchFamily="34" charset="-122"/>
                 <a:cs typeface="Calibri" pitchFamily="34" charset="-120"/>
               </a:rPr>
-              <a:t>🔹 Rango de σ: [0.15, 0.90]</a:t>
+              <a:t>&gt;&gt; Rango de σ: [0.15, 0.90]</a:t>
             </a:r>
             <a:endParaRPr lang="en-US" sz="1200" dirty="0"/>
           </a:p>
@@ -9319,7 +9535,7 @@
                 <a:ea typeface="Calibri" pitchFamily="34" charset="-122"/>
                 <a:cs typeface="Calibri" pitchFamily="34" charset="-120"/>
               </a:rPr>
-              <a:t>🔸 σ × 1.5 para hijos de cruce (shake)</a:t>
+              <a:t>&gt;&gt; σ x 1.5 para hijos de cruce (shake)</a:t>
             </a:r>
             <a:endParaRPr lang="en-US" sz="1200" dirty="0"/>
           </a:p>
@@ -9358,7 +9574,7 @@
                 <a:ea typeface="Calibri" pitchFamily="34" charset="-122"/>
                 <a:cs typeface="Calibri" pitchFamily="34" charset="-120"/>
               </a:rPr>
-              <a:t>🔸 ~13 individuos seeded (patrón marcha)</a:t>
+              <a:t>&gt;&gt; ~13 individuos seeded (patrón marcha)</a:t>
             </a:r>
             <a:endParaRPr lang="en-US" sz="1200" dirty="0"/>
           </a:p>
@@ -9397,7 +9613,7 @@
                 <a:ea typeface="Calibri" pitchFamily="34" charset="-122"/>
                 <a:cs typeface="Calibri" pitchFamily="34" charset="-120"/>
               </a:rPr>
-              <a:t>🔸 ~10 individuos totalmente aleatorios</a:t>
+              <a:t>&gt;&gt; ~10 individuos totalmente aleatorios</a:t>
             </a:r>
             <a:endParaRPr lang="en-US" sz="1200" dirty="0"/>
           </a:p>
@@ -9436,7 +9652,7 @@
                 <a:ea typeface="Calibri" pitchFamily="34" charset="-122"/>
                 <a:cs typeface="Calibri" pitchFamily="34" charset="-120"/>
               </a:rPr>
-              <a:t>🔸 Total inyectado: ~23% de la población</a:t>
+              <a:t>&gt;&gt; Total inyectado: ~23% de la población</a:t>
             </a:r>
             <a:endParaRPr lang="en-US" sz="1200" dirty="0"/>
           </a:p>
@@ -10597,14 +10813,77 @@
       </p:sp>
       <p:sp>
         <p:nvSpPr>
-          <p:cNvPr id="7" name="Text 5"/>
-          <p:cNvSpPr/>
-          <p:nvPr/>
-        </p:nvSpPr>
-        <p:spPr>
-          <a:xfrm>
-            <a:off x="896112" y="1554480"/>
-            <a:ext cx="3547872" cy="384048"/>
+          <p:cNvPr id="7" name="Shape 5"/>
+          <p:cNvSpPr/>
+          <p:nvPr/>
+        </p:nvSpPr>
+        <p:spPr>
+          <a:xfrm>
+            <a:off x="896112" y="1536192"/>
+            <a:ext cx="384048" cy="384048"/>
+          </a:xfrm>
+          <a:prstGeom prst="ellipse">
+            <a:avLst/>
+          </a:prstGeom>
+          <a:solidFill>
+            <a:srgbClr val="00D4B8">
+              <a:alpha val="80000"/>
+            </a:srgbClr>
+          </a:solidFill>
+          <a:ln w="12700">
+            <a:solidFill>
+              <a:srgbClr val="00D4B8"/>
+            </a:solidFill>
+            <a:prstDash val="solid"/>
+          </a:ln>
+        </p:spPr>
+      </p:sp>
+      <p:sp>
+        <p:nvSpPr>
+          <p:cNvPr id="8" name="Text 6"/>
+          <p:cNvSpPr/>
+          <p:nvPr/>
+        </p:nvSpPr>
+        <p:spPr>
+          <a:xfrm>
+            <a:off x="896112" y="1536192"/>
+            <a:ext cx="384048" cy="384048"/>
+          </a:xfrm>
+          <a:prstGeom prst="rect">
+            <a:avLst/>
+          </a:prstGeom>
+          <a:noFill/>
+          <a:ln/>
+        </p:spPr>
+        <p:txBody>
+          <a:bodyPr wrap="square" rtlCol="0" anchor="ctr"/>
+          <a:lstStyle/>
+          <a:p>
+            <a:pPr algn="ctr" indent="0" marL="0">
+              <a:buNone/>
+            </a:pPr>
+            <a:r>
+              <a:rPr lang="en-US" sz="900" b="1" dirty="0">
+                <a:solidFill>
+                  <a:srgbClr val="FFFFFF"/>
+                </a:solidFill>
+              </a:rPr>
+              <a:t>DNA</a:t>
+            </a:r>
+            <a:endParaRPr lang="en-US" sz="900" dirty="0"/>
+          </a:p>
+        </p:txBody>
+      </p:sp>
+      <p:sp>
+        <p:nvSpPr>
+          <p:cNvPr id="9" name="Text 7"/>
+          <p:cNvSpPr/>
+          <p:nvPr/>
+        </p:nvSpPr>
+        <p:spPr>
+          <a:xfrm>
+            <a:off x="1353312" y="1554480"/>
+            <a:ext cx="3090672" cy="384048"/>
           </a:xfrm>
           <a:prstGeom prst="rect">
             <a:avLst/>
@@ -10628,7 +10907,7 @@
                 <a:ea typeface="Arial" pitchFamily="34" charset="-122"/>
                 <a:cs typeface="Arial" pitchFamily="34" charset="-120"/>
               </a:rPr>
-              <a:t>🧬  Codificación efectiva</a:t>
+              <a:t>Codificación efectiva</a:t>
             </a:r>
             <a:endParaRPr lang="en-US" sz="1400" dirty="0"/>
           </a:p>
@@ -10636,7 +10915,7 @@
       </p:sp>
       <p:sp>
         <p:nvSpPr>
-          <p:cNvPr id="8" name="Text 6"/>
+          <p:cNvPr id="10" name="Text 8"/>
           <p:cNvSpPr/>
           <p:nvPr/>
         </p:nvSpPr>
@@ -10675,7 +10954,7 @@
       </p:sp>
       <p:sp>
         <p:nvSpPr>
-          <p:cNvPr id="9" name="Shape 7"/>
+          <p:cNvPr id="11" name="Shape 9"/>
           <p:cNvSpPr/>
           <p:nvPr/>
         </p:nvSpPr>
@@ -10707,7 +10986,7 @@
       </p:sp>
       <p:sp>
         <p:nvSpPr>
-          <p:cNvPr id="10" name="Shape 8"/>
+          <p:cNvPr id="12" name="Shape 10"/>
           <p:cNvSpPr/>
           <p:nvPr/>
         </p:nvSpPr>
@@ -10732,14 +11011,77 @@
       </p:sp>
       <p:sp>
         <p:nvSpPr>
-          <p:cNvPr id="11" name="Text 9"/>
-          <p:cNvSpPr/>
-          <p:nvPr/>
-        </p:nvSpPr>
-        <p:spPr>
-          <a:xfrm>
-            <a:off x="5010912" y="1554480"/>
-            <a:ext cx="3547872" cy="384048"/>
+          <p:cNvPr id="13" name="Shape 11"/>
+          <p:cNvSpPr/>
+          <p:nvPr/>
+        </p:nvSpPr>
+        <p:spPr>
+          <a:xfrm>
+            <a:off x="5010912" y="1536192"/>
+            <a:ext cx="384048" cy="384048"/>
+          </a:xfrm>
+          <a:prstGeom prst="ellipse">
+            <a:avLst/>
+          </a:prstGeom>
+          <a:solidFill>
+            <a:srgbClr val="7B61FF">
+              <a:alpha val="80000"/>
+            </a:srgbClr>
+          </a:solidFill>
+          <a:ln w="12700">
+            <a:solidFill>
+              <a:srgbClr val="7B61FF"/>
+            </a:solidFill>
+            <a:prstDash val="solid"/>
+          </a:ln>
+        </p:spPr>
+      </p:sp>
+      <p:sp>
+        <p:nvSpPr>
+          <p:cNvPr id="14" name="Text 12"/>
+          <p:cNvSpPr/>
+          <p:nvPr/>
+        </p:nvSpPr>
+        <p:spPr>
+          <a:xfrm>
+            <a:off x="5010912" y="1536192"/>
+            <a:ext cx="384048" cy="384048"/>
+          </a:xfrm>
+          <a:prstGeom prst="rect">
+            <a:avLst/>
+          </a:prstGeom>
+          <a:noFill/>
+          <a:ln/>
+        </p:spPr>
+        <p:txBody>
+          <a:bodyPr wrap="square" rtlCol="0" anchor="ctr"/>
+          <a:lstStyle/>
+          <a:p>
+            <a:pPr algn="ctr" indent="0" marL="0">
+              <a:buNone/>
+            </a:pPr>
+            <a:r>
+              <a:rPr lang="en-US" sz="900" b="1" dirty="0">
+                <a:solidFill>
+                  <a:srgbClr val="FFFFFF"/>
+                </a:solidFill>
+              </a:rPr>
+              <a:t>&lt;&lt;</a:t>
+            </a:r>
+            <a:endParaRPr lang="en-US" sz="900" dirty="0"/>
+          </a:p>
+        </p:txBody>
+      </p:sp>
+      <p:sp>
+        <p:nvSpPr>
+          <p:cNvPr id="15" name="Text 13"/>
+          <p:cNvSpPr/>
+          <p:nvPr/>
+        </p:nvSpPr>
+        <p:spPr>
+          <a:xfrm>
+            <a:off x="5468112" y="1554480"/>
+            <a:ext cx="3090672" cy="384048"/>
           </a:xfrm>
           <a:prstGeom prst="rect">
             <a:avLst/>
@@ -10763,7 +11105,7 @@
                 <a:ea typeface="Arial" pitchFamily="34" charset="-122"/>
                 <a:cs typeface="Arial" pitchFamily="34" charset="-120"/>
               </a:rPr>
-              <a:t>⚡  Convergencia rápida</a:t>
+              <a:t>Convergencia rápida</a:t>
             </a:r>
             <a:endParaRPr lang="en-US" sz="1400" dirty="0"/>
           </a:p>
@@ -10771,7 +11113,7 @@
       </p:sp>
       <p:sp>
         <p:nvSpPr>
-          <p:cNvPr id="12" name="Text 10"/>
+          <p:cNvPr id="16" name="Text 14"/>
           <p:cNvSpPr/>
           <p:nvPr/>
         </p:nvSpPr>
@@ -10810,7 +11152,7 @@
       </p:sp>
       <p:sp>
         <p:nvSpPr>
-          <p:cNvPr id="13" name="Shape 11"/>
+          <p:cNvPr id="17" name="Shape 15"/>
           <p:cNvSpPr/>
           <p:nvPr/>
         </p:nvSpPr>
@@ -10842,7 +11184,7 @@
       </p:sp>
       <p:sp>
         <p:nvSpPr>
-          <p:cNvPr id="14" name="Shape 12"/>
+          <p:cNvPr id="18" name="Shape 16"/>
           <p:cNvSpPr/>
           <p:nvPr/>
         </p:nvSpPr>
@@ -10867,14 +11209,77 @@
       </p:sp>
       <p:sp>
         <p:nvSpPr>
-          <p:cNvPr id="15" name="Text 13"/>
-          <p:cNvSpPr/>
-          <p:nvPr/>
-        </p:nvSpPr>
-        <p:spPr>
-          <a:xfrm>
-            <a:off x="896112" y="3246120"/>
-            <a:ext cx="3547872" cy="384048"/>
+          <p:cNvPr id="19" name="Shape 17"/>
+          <p:cNvSpPr/>
+          <p:nvPr/>
+        </p:nvSpPr>
+        <p:spPr>
+          <a:xfrm>
+            <a:off x="896112" y="3227832"/>
+            <a:ext cx="384048" cy="384048"/>
+          </a:xfrm>
+          <a:prstGeom prst="ellipse">
+            <a:avLst/>
+          </a:prstGeom>
+          <a:solidFill>
+            <a:srgbClr val="FF6B35">
+              <a:alpha val="80000"/>
+            </a:srgbClr>
+          </a:solidFill>
+          <a:ln w="12700">
+            <a:solidFill>
+              <a:srgbClr val="FF6B35"/>
+            </a:solidFill>
+            <a:prstDash val="solid"/>
+          </a:ln>
+        </p:spPr>
+      </p:sp>
+      <p:sp>
+        <p:nvSpPr>
+          <p:cNvPr id="20" name="Text 18"/>
+          <p:cNvSpPr/>
+          <p:nvPr/>
+        </p:nvSpPr>
+        <p:spPr>
+          <a:xfrm>
+            <a:off x="896112" y="3227832"/>
+            <a:ext cx="384048" cy="384048"/>
+          </a:xfrm>
+          <a:prstGeom prst="rect">
+            <a:avLst/>
+          </a:prstGeom>
+          <a:noFill/>
+          <a:ln/>
+        </p:spPr>
+        <p:txBody>
+          <a:bodyPr wrap="square" rtlCol="0" anchor="ctr"/>
+          <a:lstStyle/>
+          <a:p>
+            <a:pPr algn="ctr" indent="0" marL="0">
+              <a:buNone/>
+            </a:pPr>
+            <a:r>
+              <a:rPr lang="en-US" sz="900" b="1" dirty="0">
+                <a:solidFill>
+                  <a:srgbClr val="FFFFFF"/>
+                </a:solidFill>
+              </a:rPr>
+              <a:t>~o~</a:t>
+            </a:r>
+            <a:endParaRPr lang="en-US" sz="900" dirty="0"/>
+          </a:p>
+        </p:txBody>
+      </p:sp>
+      <p:sp>
+        <p:nvSpPr>
+          <p:cNvPr id="21" name="Text 19"/>
+          <p:cNvSpPr/>
+          <p:nvPr/>
+        </p:nvSpPr>
+        <p:spPr>
+          <a:xfrm>
+            <a:off x="1353312" y="3246120"/>
+            <a:ext cx="3090672" cy="384048"/>
           </a:xfrm>
           <a:prstGeom prst="rect">
             <a:avLst/>
@@ -10898,7 +11303,7 @@
                 <a:ea typeface="Arial" pitchFamily="34" charset="-122"/>
                 <a:cs typeface="Arial" pitchFamily="34" charset="-120"/>
               </a:rPr>
-              <a:t>🔄  Balance exp./explor.</a:t>
+              <a:t>Balance exp./explor.</a:t>
             </a:r>
             <a:endParaRPr lang="en-US" sz="1400" dirty="0"/>
           </a:p>
@@ -10906,7 +11311,7 @@
       </p:sp>
       <p:sp>
         <p:nvSpPr>
-          <p:cNvPr id="16" name="Text 14"/>
+          <p:cNvPr id="22" name="Text 20"/>
           <p:cNvSpPr/>
           <p:nvPr/>
         </p:nvSpPr>
@@ -10945,7 +11350,7 @@
       </p:sp>
       <p:sp>
         <p:nvSpPr>
-          <p:cNvPr id="17" name="Shape 15"/>
+          <p:cNvPr id="23" name="Shape 21"/>
           <p:cNvSpPr/>
           <p:nvPr/>
         </p:nvSpPr>
@@ -10977,7 +11382,7 @@
       </p:sp>
       <p:sp>
         <p:nvSpPr>
-          <p:cNvPr id="18" name="Shape 16"/>
+          <p:cNvPr id="24" name="Shape 22"/>
           <p:cNvSpPr/>
           <p:nvPr/>
         </p:nvSpPr>
@@ -11002,14 +11407,77 @@
       </p:sp>
       <p:sp>
         <p:nvSpPr>
-          <p:cNvPr id="19" name="Text 17"/>
-          <p:cNvSpPr/>
-          <p:nvPr/>
-        </p:nvSpPr>
-        <p:spPr>
-          <a:xfrm>
-            <a:off x="5010912" y="3246120"/>
-            <a:ext cx="3547872" cy="384048"/>
+          <p:cNvPr id="25" name="Shape 23"/>
+          <p:cNvSpPr/>
+          <p:nvPr/>
+        </p:nvSpPr>
+        <p:spPr>
+          <a:xfrm>
+            <a:off x="5010912" y="3227832"/>
+            <a:ext cx="384048" cy="384048"/>
+          </a:xfrm>
+          <a:prstGeom prst="ellipse">
+            <a:avLst/>
+          </a:prstGeom>
+          <a:solidFill>
+            <a:srgbClr val="2ECC71">
+              <a:alpha val="80000"/>
+            </a:srgbClr>
+          </a:solidFill>
+          <a:ln w="12700">
+            <a:solidFill>
+              <a:srgbClr val="2ECC71"/>
+            </a:solidFill>
+            <a:prstDash val="solid"/>
+          </a:ln>
+        </p:spPr>
+      </p:sp>
+      <p:sp>
+        <p:nvSpPr>
+          <p:cNvPr id="26" name="Text 24"/>
+          <p:cNvSpPr/>
+          <p:nvPr/>
+        </p:nvSpPr>
+        <p:spPr>
+          <a:xfrm>
+            <a:off x="5010912" y="3227832"/>
+            <a:ext cx="384048" cy="384048"/>
+          </a:xfrm>
+          <a:prstGeom prst="rect">
+            <a:avLst/>
+          </a:prstGeom>
+          <a:noFill/>
+          <a:ln/>
+        </p:spPr>
+        <p:txBody>
+          <a:bodyPr wrap="square" rtlCol="0" anchor="ctr"/>
+          <a:lstStyle/>
+          <a:p>
+            <a:pPr algn="ctr" indent="0" marL="0">
+              <a:buNone/>
+            </a:pPr>
+            <a:r>
+              <a:rPr lang="en-US" sz="900" b="1" dirty="0">
+                <a:solidFill>
+                  <a:srgbClr val="FFFFFF"/>
+                </a:solidFill>
+              </a:rPr>
+              <a:t>#1</a:t>
+            </a:r>
+            <a:endParaRPr lang="en-US" sz="900" dirty="0"/>
+          </a:p>
+        </p:txBody>
+      </p:sp>
+      <p:sp>
+        <p:nvSpPr>
+          <p:cNvPr id="27" name="Text 25"/>
+          <p:cNvSpPr/>
+          <p:nvPr/>
+        </p:nvSpPr>
+        <p:spPr>
+          <a:xfrm>
+            <a:off x="5468112" y="3246120"/>
+            <a:ext cx="3090672" cy="384048"/>
           </a:xfrm>
           <a:prstGeom prst="rect">
             <a:avLst/>
@@ -11033,7 +11501,7 @@
                 <a:ea typeface="Arial" pitchFamily="34" charset="-122"/>
                 <a:cs typeface="Arial" pitchFamily="34" charset="-120"/>
               </a:rPr>
-              <a:t>🏆  Resultado</a:t>
+              <a:t>Resultado</a:t>
             </a:r>
             <a:endParaRPr lang="en-US" sz="1400" dirty="0"/>
           </a:p>
@@ -11041,7 +11509,7 @@
       </p:sp>
       <p:sp>
         <p:nvSpPr>
-          <p:cNvPr id="20" name="Text 18"/>
+          <p:cNvPr id="28" name="Text 26"/>
           <p:cNvSpPr/>
           <p:nvPr/>
         </p:nvSpPr>
@@ -11080,7 +11548,7 @@
       </p:sp>
       <p:sp>
         <p:nvSpPr>
-          <p:cNvPr id="21" name="Shape 19"/>
+          <p:cNvPr id="29" name="Shape 27"/>
           <p:cNvSpPr/>
           <p:nvPr/>
         </p:nvSpPr>
@@ -11105,7 +11573,7 @@
       </p:sp>
       <p:sp>
         <p:nvSpPr>
-          <p:cNvPr id="22" name="Text 20"/>
+          <p:cNvPr id="30" name="Text 28"/>
           <p:cNvSpPr/>
           <p:nvPr/>
         </p:nvSpPr>
